--- a/spark/Syllabus.pptx
+++ b/spark/Syllabus.pptx
@@ -899,10 +899,7 @@
               <a:spcPct val="100000"/>
             </a:lnSpc>
           </a:pPr>
-          <a:r>
-            <a:rPr lang="en-US"/>
-            <a:t>Introductions</a:t>
-          </a:r>
+          <a:endParaRPr lang="en-US" dirty="0"/>
         </a:p>
       </dgm:t>
     </dgm:pt>
@@ -940,10 +937,7 @@
               <a:spcPct val="100000"/>
             </a:lnSpc>
           </a:pPr>
-          <a:r>
-            <a:rPr lang="en-US"/>
-            <a:t>What to Expect</a:t>
-          </a:r>
+          <a:endParaRPr lang="en-US" dirty="0"/>
         </a:p>
       </dgm:t>
     </dgm:pt>
@@ -982,8 +976,8 @@
             </a:lnSpc>
           </a:pPr>
           <a:r>
-            <a:rPr lang="en-US"/>
-            <a:t>How to Excel in this Course</a:t>
+            <a:rPr lang="en-US" dirty="0"/>
+            <a:t>\</a:t>
           </a:r>
         </a:p>
       </dgm:t>
@@ -1031,13 +1025,13 @@
       <dgm:prSet presAssocID="{57923C1A-FF59-4300-9997-9B5EFFCD9BFC}" presName="iconRect" presStyleLbl="node1" presStyleIdx="0" presStyleCnt="3"/>
       <dgm:spPr>
         <a:blipFill>
-          <a:blip xmlns:r="http://schemas.openxmlformats.org/officeDocument/2006/relationships" r:embed="rId1">
+          <a:blip xmlns:r="http://schemas.openxmlformats.org/officeDocument/2006/relationships">
             <a:extLst>
               <a:ext uri="{28A0092B-C50C-407E-A947-70E740481C1C}">
                 <a14:useLocalDpi xmlns:a14="http://schemas.microsoft.com/office/drawing/2010/main" val="0"/>
               </a:ext>
               <a:ext uri="{96DAC541-7B7A-43D3-8B79-37D633B846F1}">
-                <asvg:svgBlip xmlns:asvg="http://schemas.microsoft.com/office/drawing/2016/SVG/main" r:embed="rId2"/>
+                <asvg:svgBlip xmlns:asvg="http://schemas.microsoft.com/office/drawing/2016/SVG/main" r:embed="rId1"/>
               </a:ext>
             </a:extLst>
           </a:blip>
@@ -1081,13 +1075,13 @@
       <dgm:prSet presAssocID="{EA2DB709-2347-445B-9848-85D77F670862}" presName="iconRect" presStyleLbl="node1" presStyleIdx="1" presStyleCnt="3"/>
       <dgm:spPr>
         <a:blipFill>
-          <a:blip xmlns:r="http://schemas.openxmlformats.org/officeDocument/2006/relationships" r:embed="rId3">
+          <a:blip xmlns:r="http://schemas.openxmlformats.org/officeDocument/2006/relationships">
             <a:extLst>
               <a:ext uri="{28A0092B-C50C-407E-A947-70E740481C1C}">
                 <a14:useLocalDpi xmlns:a14="http://schemas.microsoft.com/office/drawing/2010/main" val="0"/>
               </a:ext>
               <a:ext uri="{96DAC541-7B7A-43D3-8B79-37D633B846F1}">
-                <asvg:svgBlip xmlns:asvg="http://schemas.microsoft.com/office/drawing/2016/SVG/main" r:embed="rId4"/>
+                <asvg:svgBlip xmlns:asvg="http://schemas.microsoft.com/office/drawing/2016/SVG/main" r:embed="rId2"/>
               </a:ext>
             </a:extLst>
           </a:blip>
@@ -1131,13 +1125,13 @@
       <dgm:prSet presAssocID="{0A104462-619F-4DC7-BFF1-9C9A22513BB5}" presName="iconRect" presStyleLbl="node1" presStyleIdx="2" presStyleCnt="3"/>
       <dgm:spPr>
         <a:blipFill>
-          <a:blip xmlns:r="http://schemas.openxmlformats.org/officeDocument/2006/relationships" r:embed="rId5">
+          <a:blip xmlns:r="http://schemas.openxmlformats.org/officeDocument/2006/relationships">
             <a:extLst>
               <a:ext uri="{28A0092B-C50C-407E-A947-70E740481C1C}">
                 <a14:useLocalDpi xmlns:a14="http://schemas.microsoft.com/office/drawing/2010/main" val="0"/>
               </a:ext>
               <a:ext uri="{96DAC541-7B7A-43D3-8B79-37D633B846F1}">
-                <asvg:svgBlip xmlns:asvg="http://schemas.microsoft.com/office/drawing/2016/SVG/main" r:embed="rId6"/>
+                <asvg:svgBlip xmlns:asvg="http://schemas.microsoft.com/office/drawing/2016/SVG/main" r:embed="rId3"/>
               </a:ext>
             </a:extLst>
           </a:blip>
@@ -1266,13 +1260,13 @@
           <a:avLst/>
         </a:prstGeom>
         <a:blipFill>
-          <a:blip xmlns:r="http://schemas.openxmlformats.org/officeDocument/2006/relationships" r:embed="rId1">
+          <a:blip xmlns:r="http://schemas.openxmlformats.org/officeDocument/2006/relationships">
             <a:extLst>
               <a:ext uri="{28A0092B-C50C-407E-A947-70E740481C1C}">
                 <a14:useLocalDpi xmlns:a14="http://schemas.microsoft.com/office/drawing/2010/main" val="0"/>
               </a:ext>
               <a:ext uri="{96DAC541-7B7A-43D3-8B79-37D633B846F1}">
-                <asvg:svgBlip xmlns:asvg="http://schemas.microsoft.com/office/drawing/2016/SVG/main" r:embed="rId2"/>
+                <asvg:svgBlip xmlns:asvg="http://schemas.microsoft.com/office/drawing/2016/SVG/main" r:embed="rId1"/>
               </a:ext>
             </a:extLst>
           </a:blip>
@@ -1357,10 +1351,7 @@
             </a:spcAft>
             <a:buNone/>
           </a:pPr>
-          <a:r>
-            <a:rPr lang="en-US" sz="2500" kern="1200"/>
-            <a:t>Introductions</a:t>
-          </a:r>
+          <a:endParaRPr lang="en-US" sz="2500" kern="1200" dirty="0"/>
         </a:p>
       </dsp:txBody>
       <dsp:txXfrm>
@@ -1424,13 +1415,13 @@
           <a:avLst/>
         </a:prstGeom>
         <a:blipFill>
-          <a:blip xmlns:r="http://schemas.openxmlformats.org/officeDocument/2006/relationships" r:embed="rId3">
+          <a:blip xmlns:r="http://schemas.openxmlformats.org/officeDocument/2006/relationships">
             <a:extLst>
               <a:ext uri="{28A0092B-C50C-407E-A947-70E740481C1C}">
                 <a14:useLocalDpi xmlns:a14="http://schemas.microsoft.com/office/drawing/2010/main" val="0"/>
               </a:ext>
               <a:ext uri="{96DAC541-7B7A-43D3-8B79-37D633B846F1}">
-                <asvg:svgBlip xmlns:asvg="http://schemas.microsoft.com/office/drawing/2016/SVG/main" r:embed="rId4"/>
+                <asvg:svgBlip xmlns:asvg="http://schemas.microsoft.com/office/drawing/2016/SVG/main" r:embed="rId2"/>
               </a:ext>
             </a:extLst>
           </a:blip>
@@ -1515,10 +1506,7 @@
             </a:spcAft>
             <a:buNone/>
           </a:pPr>
-          <a:r>
-            <a:rPr lang="en-US" sz="2500" kern="1200"/>
-            <a:t>What to Expect</a:t>
-          </a:r>
+          <a:endParaRPr lang="en-US" sz="2500" kern="1200" dirty="0"/>
         </a:p>
       </dsp:txBody>
       <dsp:txXfrm>
@@ -1582,13 +1570,13 @@
           <a:avLst/>
         </a:prstGeom>
         <a:blipFill>
-          <a:blip xmlns:r="http://schemas.openxmlformats.org/officeDocument/2006/relationships" r:embed="rId5">
+          <a:blip xmlns:r="http://schemas.openxmlformats.org/officeDocument/2006/relationships">
             <a:extLst>
               <a:ext uri="{28A0092B-C50C-407E-A947-70E740481C1C}">
                 <a14:useLocalDpi xmlns:a14="http://schemas.microsoft.com/office/drawing/2010/main" val="0"/>
               </a:ext>
               <a:ext uri="{96DAC541-7B7A-43D3-8B79-37D633B846F1}">
-                <asvg:svgBlip xmlns:asvg="http://schemas.microsoft.com/office/drawing/2016/SVG/main" r:embed="rId6"/>
+                <asvg:svgBlip xmlns:asvg="http://schemas.microsoft.com/office/drawing/2016/SVG/main" r:embed="rId3"/>
               </a:ext>
             </a:extLst>
           </a:blip>
@@ -1674,8 +1662,8 @@
             <a:buNone/>
           </a:pPr>
           <a:r>
-            <a:rPr lang="en-US" sz="2500" kern="1200"/>
-            <a:t>How to Excel in this Course</a:t>
+            <a:rPr lang="en-US" sz="2500" kern="1200" dirty="0"/>
+            <a:t>\</a:t>
           </a:r>
         </a:p>
       </dsp:txBody>
@@ -3069,6 +3057,13 @@
             <a:schemeClr val="lt1"/>
           </a:fontRef>
         </p:style>
+        <p:txBody>
+          <a:bodyPr/>
+          <a:lstStyle/>
+          <a:p>
+            <a:endParaRPr lang="en-US"/>
+          </a:p>
+        </p:txBody>
       </p:sp>
       <p:sp>
         <p:nvSpPr>
@@ -3260,7 +3255,7 @@
             <a:fld id="{B61BEF0D-F0BB-DE4B-95CE-6DB70DBA9567}" type="datetimeFigureOut">
               <a:rPr lang="en-US" dirty="0"/>
               <a:pPr/>
-              <a:t>9/19/2025</a:t>
+              <a:t>7/19/2026</a:t>
             </a:fld>
             <a:endParaRPr lang="en-US" dirty="0"/>
           </a:p>
@@ -3522,7 +3517,7 @@
             <a:fld id="{B61BEF0D-F0BB-DE4B-95CE-6DB70DBA9567}" type="datetimeFigureOut">
               <a:rPr lang="en-US" dirty="0"/>
               <a:pPr/>
-              <a:t>9/19/2025</a:t>
+              <a:t>7/19/2026</a:t>
             </a:fld>
             <a:endParaRPr lang="en-US" dirty="0"/>
           </a:p>
@@ -3757,7 +3752,7 @@
             <a:fld id="{B61BEF0D-F0BB-DE4B-95CE-6DB70DBA9567}" type="datetimeFigureOut">
               <a:rPr lang="en-US" dirty="0"/>
               <a:pPr/>
-              <a:t>9/19/2025</a:t>
+              <a:t>7/19/2026</a:t>
             </a:fld>
             <a:endParaRPr lang="en-US" dirty="0"/>
           </a:p>
@@ -3997,7 +3992,7 @@
             <a:fld id="{B61BEF0D-F0BB-DE4B-95CE-6DB70DBA9567}" type="datetimeFigureOut">
               <a:rPr lang="en-US" dirty="0"/>
               <a:pPr/>
-              <a:t>9/19/2025</a:t>
+              <a:t>7/19/2026</a:t>
             </a:fld>
             <a:endParaRPr lang="en-US" dirty="0"/>
           </a:p>
@@ -4305,7 +4300,7 @@
             <a:fld id="{B61BEF0D-F0BB-DE4B-95CE-6DB70DBA9567}" type="datetimeFigureOut">
               <a:rPr lang="en-US" dirty="0"/>
               <a:pPr/>
-              <a:t>9/19/2025</a:t>
+              <a:t>7/19/2026</a:t>
             </a:fld>
             <a:endParaRPr lang="en-US" dirty="0"/>
           </a:p>
@@ -4606,7 +4601,7 @@
             <a:fld id="{B61BEF0D-F0BB-DE4B-95CE-6DB70DBA9567}" type="datetimeFigureOut">
               <a:rPr lang="en-US" dirty="0"/>
               <a:pPr/>
-              <a:t>9/19/2025</a:t>
+              <a:t>7/19/2026</a:t>
             </a:fld>
             <a:endParaRPr lang="en-US" dirty="0"/>
           </a:p>
@@ -5027,7 +5022,7 @@
             <a:fld id="{B61BEF0D-F0BB-DE4B-95CE-6DB70DBA9567}" type="datetimeFigureOut">
               <a:rPr lang="en-US" dirty="0"/>
               <a:pPr/>
-              <a:t>9/19/2025</a:t>
+              <a:t>7/19/2026</a:t>
             </a:fld>
             <a:endParaRPr lang="en-US" dirty="0"/>
           </a:p>
@@ -5190,7 +5185,7 @@
             <a:fld id="{B61BEF0D-F0BB-DE4B-95CE-6DB70DBA9567}" type="datetimeFigureOut">
               <a:rPr lang="en-US" dirty="0"/>
               <a:pPr/>
-              <a:t>9/19/2025</a:t>
+              <a:t>7/19/2026</a:t>
             </a:fld>
             <a:endParaRPr lang="en-US" dirty="0"/>
           </a:p>
@@ -5287,7 +5282,7 @@
             <a:fld id="{B61BEF0D-F0BB-DE4B-95CE-6DB70DBA9567}" type="datetimeFigureOut">
               <a:rPr lang="en-US" dirty="0"/>
               <a:pPr/>
-              <a:t>9/19/2025</a:t>
+              <a:t>7/19/2026</a:t>
             </a:fld>
             <a:endParaRPr lang="en-US" dirty="0"/>
           </a:p>
@@ -5665,7 +5660,7 @@
             <a:fld id="{B61BEF0D-F0BB-DE4B-95CE-6DB70DBA9567}" type="datetimeFigureOut">
               <a:rPr lang="en-US" dirty="0"/>
               <a:pPr/>
-              <a:t>9/19/2025</a:t>
+              <a:t>7/19/2026</a:t>
             </a:fld>
             <a:endParaRPr lang="en-US" dirty="0"/>
           </a:p>
@@ -5951,7 +5946,7 @@
             <a:fld id="{B61BEF0D-F0BB-DE4B-95CE-6DB70DBA9567}" type="datetimeFigureOut">
               <a:rPr lang="en-US" dirty="0"/>
               <a:pPr/>
-              <a:t>9/19/2025</a:t>
+              <a:t>7/19/2026</a:t>
             </a:fld>
             <a:endParaRPr lang="en-US" dirty="0"/>
           </a:p>
@@ -6190,7 +6185,7 @@
             <a:fld id="{B61BEF0D-F0BB-DE4B-95CE-6DB70DBA9567}" type="datetimeFigureOut">
               <a:rPr lang="en-US" dirty="0"/>
               <a:pPr/>
-              <a:t>9/19/2025</a:t>
+              <a:t>7/19/2026</a:t>
             </a:fld>
             <a:endParaRPr lang="en-US" dirty="0"/>
           </a:p>
@@ -6307,6 +6302,13 @@
             <a:schemeClr val="lt1"/>
           </a:fontRef>
         </p:style>
+        <p:txBody>
+          <a:bodyPr/>
+          <a:lstStyle/>
+          <a:p>
+            <a:endParaRPr lang="en-US"/>
+          </a:p>
+        </p:txBody>
       </p:sp>
       <p:sp>
         <p:nvSpPr>
@@ -6344,6 +6346,13 @@
             <a:schemeClr val="lt1"/>
           </a:fontRef>
         </p:style>
+        <p:txBody>
+          <a:bodyPr/>
+          <a:lstStyle/>
+          <a:p>
+            <a:endParaRPr lang="en-US"/>
+          </a:p>
+        </p:txBody>
       </p:sp>
       <p:sp>
         <p:nvSpPr>
@@ -6381,6 +6390,13 @@
             <a:schemeClr val="lt1"/>
           </a:fontRef>
         </p:style>
+        <p:txBody>
+          <a:bodyPr/>
+          <a:lstStyle/>
+          <a:p>
+            <a:endParaRPr lang="en-US"/>
+          </a:p>
+        </p:txBody>
       </p:sp>
     </p:spTree>
     <p:extLst>
@@ -6807,10 +6823,7 @@
           <a:bodyPr/>
           <a:lstStyle/>
           <a:p>
-            <a:r>
-              <a:rPr lang="en-US" dirty="0"/>
-              <a:t>Welcome To Training</a:t>
-            </a:r>
+            <a:endParaRPr lang="en-US" dirty="0"/>
           </a:p>
         </p:txBody>
       </p:sp>
@@ -6908,6 +6921,11 @@
           </p:cNvGraphicFramePr>
           <p:nvPr>
             <p:ph idx="1"/>
+            <p:extLst>
+              <p:ext uri="{D42A27DB-BD31-4B8C-83A1-F6EECF244321}">
+                <p14:modId xmlns:p14="http://schemas.microsoft.com/office/powerpoint/2010/main" val="3317100333"/>
+              </p:ext>
+            </p:extLst>
           </p:nvPr>
         </p:nvGraphicFramePr>
         <p:xfrm>
@@ -6971,10 +6989,7 @@
           <a:bodyPr/>
           <a:lstStyle/>
           <a:p>
-            <a:r>
-              <a:rPr lang="en-US" dirty="0"/>
-              <a:t>Introductions</a:t>
-            </a:r>
+            <a:endParaRPr lang="en-US" dirty="0"/>
           </a:p>
         </p:txBody>
       </p:sp>
@@ -7012,77 +7027,11 @@
                 <a:latin typeface="Gill Sans MT"/>
                 <a:cs typeface="Segoe UI"/>
               </a:rPr>
-              <a:t>I’ve been at Revature 4 years</a:t>
+              <a:t>I</a:t>
             </a:r>
           </a:p>
-          <a:p>
-            <a:pPr marL="305435" indent="-305435"/>
-            <a:r>
-              <a:rPr lang="en-US" dirty="0">
-                <a:latin typeface="Gill Sans MT"/>
-                <a:cs typeface="Segoe UI"/>
-              </a:rPr>
-              <a:t>I teach Salesforce, ServiceNow, &amp; .NET</a:t>
-            </a:r>
-          </a:p>
-          <a:p>
-            <a:pPr marL="305435" indent="-305435"/>
-            <a:r>
-              <a:rPr lang="en-US" dirty="0">
-                <a:latin typeface="Gill Sans MT"/>
-                <a:cs typeface="Segoe UI"/>
-              </a:rPr>
-              <a:t>Currently hold the CSA certification</a:t>
-            </a:r>
-          </a:p>
-          <a:p>
-            <a:pPr marL="305435" indent="-305435"/>
-            <a:r>
-              <a:rPr lang="en-US" dirty="0">
-                <a:latin typeface="Gill Sans MT"/>
-                <a:cs typeface="Segoe UI"/>
-              </a:rPr>
-              <a:t>Current favorite game: WoW </a:t>
-            </a:r>
-          </a:p>
         </p:txBody>
       </p:sp>
-      <p:pic>
-        <p:nvPicPr>
-          <p:cNvPr id="5" name="Picture 4" descr="A person in a suit&#10;&#10;AI-generated content may be incorrect.">
-            <a:extLst>
-              <a:ext uri="{FF2B5EF4-FFF2-40B4-BE49-F238E27FC236}">
-                <a16:creationId xmlns:a16="http://schemas.microsoft.com/office/drawing/2014/main" id="{CC025A48-B339-8A17-FC35-75E691CF8E32}"/>
-              </a:ext>
-            </a:extLst>
-          </p:cNvPr>
-          <p:cNvPicPr>
-            <a:picLocks noChangeAspect="1"/>
-          </p:cNvPicPr>
-          <p:nvPr/>
-        </p:nvPicPr>
-        <p:blipFill>
-          <a:blip r:embed="rId2">
-            <a:extLst>
-              <a:ext uri="{28A0092B-C50C-407E-A947-70E740481C1C}">
-                <a14:useLocalDpi xmlns:a14="http://schemas.microsoft.com/office/drawing/2010/main" val="0"/>
-              </a:ext>
-            </a:extLst>
-          </a:blip>
-          <a:stretch>
-            <a:fillRect/>
-          </a:stretch>
-        </p:blipFill>
-        <p:spPr>
-          <a:xfrm>
-            <a:off x="6800850" y="2737854"/>
-            <a:ext cx="2857500" cy="2857500"/>
-          </a:xfrm>
-          <a:prstGeom prst="rect">
-            <a:avLst/>
-          </a:prstGeom>
-        </p:spPr>
-      </p:pic>
     </p:spTree>
     <p:extLst>
       <p:ext uri="{BB962C8B-B14F-4D97-AF65-F5344CB8AC3E}">
@@ -7149,10 +7098,7 @@
           </a:bodyPr>
           <a:lstStyle/>
           <a:p>
-            <a:r>
-              <a:rPr lang="en-US" dirty="0"/>
-              <a:t>What to Expect</a:t>
-            </a:r>
+            <a:endParaRPr lang="en-US" dirty="0"/>
           </a:p>
         </p:txBody>
       </p:sp>
@@ -7316,59 +7262,7 @@
           <a:lstStyle/>
           <a:p>
             <a:pPr marL="305435" indent="-305435"/>
-            <a:r>
-              <a:rPr lang="en-US" dirty="0"/>
-              <a:t>13-week course</a:t>
-            </a:r>
-          </a:p>
-          <a:p>
-            <a:pPr marL="629435" lvl="1" indent="-305435"/>
-            <a:r>
-              <a:rPr lang="en-US" dirty="0"/>
-              <a:t>First 8 weeks is ServiceNow</a:t>
-            </a:r>
-          </a:p>
-          <a:p>
-            <a:pPr marL="629435" lvl="1" indent="-305435"/>
-            <a:r>
-              <a:rPr lang="en-US" dirty="0"/>
-              <a:t>Remaining 5 weeks will focus on Java</a:t>
-            </a:r>
-          </a:p>
-          <a:p>
-            <a:pPr marL="305435" indent="-305435"/>
-            <a:r>
-              <a:rPr lang="en-US" dirty="0"/>
-              <a:t>Various Assessment Types</a:t>
-            </a:r>
-          </a:p>
-          <a:p>
-            <a:pPr marL="629435" lvl="1" indent="-305435"/>
-            <a:r>
-              <a:rPr lang="en-US" dirty="0"/>
-              <a:t>Exams – Multiple Choice, Multiple Select, Short Answers</a:t>
-            </a:r>
-          </a:p>
-          <a:p>
-            <a:pPr marL="629435" lvl="1" indent="-305435"/>
-            <a:r>
-              <a:rPr lang="en-US" dirty="0"/>
-              <a:t>QC – Panel-Type Live Interviews</a:t>
-            </a:r>
-          </a:p>
-          <a:p>
-            <a:pPr marL="629435" lvl="1" indent="-305435"/>
-            <a:r>
-              <a:rPr lang="en-US" dirty="0"/>
-              <a:t>1-on-1s – Evaluations completed by the trainer (Loom or face-to-face)</a:t>
-            </a:r>
-          </a:p>
-          <a:p>
-            <a:pPr marL="629435" lvl="1" indent="-305435"/>
-            <a:r>
-              <a:rPr lang="en-US" dirty="0"/>
-              <a:t>Projects – Assigned project work that covers discussed topics (keep up day-to-day and you won’t be behind)</a:t>
-            </a:r>
+            <a:endParaRPr lang="en-US" dirty="0"/>
           </a:p>
         </p:txBody>
       </p:sp>
@@ -7423,186 +7317,7 @@
           <a:bodyPr/>
           <a:lstStyle/>
           <a:p>
-            <a:r>
-              <a:rPr lang="en-US" dirty="0"/>
-              <a:t>How to Excel in this Course</a:t>
-            </a:r>
-          </a:p>
-        </p:txBody>
-      </p:sp>
-      <p:sp>
-        <p:nvSpPr>
-          <p:cNvPr id="3" name="Content Placeholder 2">
-            <a:extLst>
-              <a:ext uri="{FF2B5EF4-FFF2-40B4-BE49-F238E27FC236}">
-                <a16:creationId xmlns:a16="http://schemas.microsoft.com/office/drawing/2014/main" id="{429EFB58-5DAE-C3C2-2D49-7AE40E75910D}"/>
-              </a:ext>
-            </a:extLst>
-          </p:cNvPr>
-          <p:cNvSpPr>
-            <a:spLocks noGrp="1"/>
-          </p:cNvSpPr>
-          <p:nvPr>
-            <p:ph idx="1"/>
-          </p:nvPr>
-        </p:nvSpPr>
-        <p:spPr>
-          <a:xfrm>
-            <a:off x="581191" y="2052918"/>
-            <a:ext cx="11029615" cy="1681246"/>
-          </a:xfrm>
-        </p:spPr>
-        <p:txBody>
-          <a:bodyPr/>
-          <a:lstStyle/>
-          <a:p>
-            <a:r>
-              <a:rPr lang="en-US" dirty="0"/>
-              <a:t>We will use slide decks throughout the course. </a:t>
-            </a:r>
-          </a:p>
-          <a:p>
-            <a:r>
-              <a:rPr lang="en-US" dirty="0"/>
-              <a:t>If it is on the slide deck, it is important, and you should consider writing it down. </a:t>
-            </a:r>
-          </a:p>
-          <a:p>
-            <a:r>
-              <a:rPr lang="en-US" dirty="0"/>
-              <a:t>Sometimes, you may see a definition, like this:</a:t>
-            </a:r>
-          </a:p>
-          <a:p>
             <a:endParaRPr lang="en-US" dirty="0"/>
-          </a:p>
-        </p:txBody>
-      </p:sp>
-      <p:sp>
-        <p:nvSpPr>
-          <p:cNvPr id="4" name="TextBox 3">
-            <a:extLst>
-              <a:ext uri="{FF2B5EF4-FFF2-40B4-BE49-F238E27FC236}">
-                <a16:creationId xmlns:a16="http://schemas.microsoft.com/office/drawing/2014/main" id="{0352E508-0D10-9772-84C7-FCC523BB1A8A}"/>
-              </a:ext>
-            </a:extLst>
-          </p:cNvPr>
-          <p:cNvSpPr txBox="1"/>
-          <p:nvPr/>
-        </p:nvSpPr>
-        <p:spPr>
-          <a:xfrm>
-            <a:off x="1739151" y="3429000"/>
-            <a:ext cx="8713694" cy="646331"/>
-          </a:xfrm>
-          <a:prstGeom prst="rect">
-            <a:avLst/>
-          </a:prstGeom>
-          <a:noFill/>
-        </p:spPr>
-        <p:txBody>
-          <a:bodyPr wrap="square" rtlCol="0">
-            <a:spAutoFit/>
-          </a:bodyPr>
-          <a:lstStyle/>
-          <a:p>
-            <a:r>
-              <a:rPr lang="en-US" dirty="0"/>
-              <a:t>Definition: </a:t>
-            </a:r>
-            <a:r>
-              <a:rPr lang="en-US" dirty="0">
-                <a:solidFill>
-                  <a:srgbClr val="00B050"/>
-                </a:solidFill>
-              </a:rPr>
-              <a:t>ServiceNow</a:t>
-            </a:r>
-            <a:r>
-              <a:rPr lang="en-US" dirty="0"/>
-              <a:t> – A cloud-based, ITSM platform that helps organizations manage and automate their work processes across IT, HR, Customer Service, and more. </a:t>
-            </a:r>
-          </a:p>
-        </p:txBody>
-      </p:sp>
-      <p:sp>
-        <p:nvSpPr>
-          <p:cNvPr id="5" name="TextBox 4">
-            <a:extLst>
-              <a:ext uri="{FF2B5EF4-FFF2-40B4-BE49-F238E27FC236}">
-                <a16:creationId xmlns:a16="http://schemas.microsoft.com/office/drawing/2014/main" id="{A54BB974-FD75-0303-8FBE-56D4DFC4209D}"/>
-              </a:ext>
-            </a:extLst>
-          </p:cNvPr>
-          <p:cNvSpPr txBox="1"/>
-          <p:nvPr/>
-        </p:nvSpPr>
-        <p:spPr>
-          <a:xfrm>
-            <a:off x="581190" y="4361691"/>
-            <a:ext cx="8858645" cy="1477328"/>
-          </a:xfrm>
-          <a:prstGeom prst="rect">
-            <a:avLst/>
-          </a:prstGeom>
-          <a:noFill/>
-        </p:spPr>
-        <p:txBody>
-          <a:bodyPr wrap="square" rtlCol="0">
-            <a:spAutoFit/>
-          </a:bodyPr>
-          <a:lstStyle/>
-          <a:p>
-            <a:pPr marL="285750" indent="-285750">
-              <a:buClr>
-                <a:schemeClr val="accent2"/>
-              </a:buClr>
-              <a:buFont typeface="Wingdings" panose="05000000000000000000" pitchFamily="2" charset="2"/>
-              <a:buChar char="§"/>
-            </a:pPr>
-            <a:r>
-              <a:rPr lang="en-US" dirty="0"/>
-              <a:t>If you see a definition:</a:t>
-            </a:r>
-          </a:p>
-          <a:p>
-            <a:pPr marL="742950" lvl="1" indent="-285750">
-              <a:buClr>
-                <a:schemeClr val="accent2"/>
-              </a:buClr>
-              <a:buFont typeface="Wingdings" panose="05000000000000000000" pitchFamily="2" charset="2"/>
-              <a:buChar char="§"/>
-            </a:pPr>
-            <a:r>
-              <a:rPr lang="en-US" dirty="0"/>
-              <a:t>Write it down</a:t>
-            </a:r>
-          </a:p>
-          <a:p>
-            <a:pPr marL="742950" lvl="1" indent="-285750">
-              <a:buClr>
-                <a:schemeClr val="accent2"/>
-              </a:buClr>
-              <a:buFont typeface="Wingdings" panose="05000000000000000000" pitchFamily="2" charset="2"/>
-              <a:buChar char="§"/>
-            </a:pPr>
-            <a:r>
-              <a:rPr lang="en-US" dirty="0"/>
-              <a:t>Write down what its context is in the larger scope</a:t>
-            </a:r>
-          </a:p>
-          <a:p>
-            <a:pPr marL="742950" lvl="1" indent="-285750">
-              <a:buClr>
-                <a:schemeClr val="accent2"/>
-              </a:buClr>
-              <a:buFont typeface="Wingdings" panose="05000000000000000000" pitchFamily="2" charset="2"/>
-              <a:buChar char="§"/>
-            </a:pPr>
-            <a:r>
-              <a:rPr lang="en-US" dirty="0"/>
-              <a:t>E.G. ServiceNow is often just one piece in an enterprise system.  An organization may have many off-the-shelf software products that may integrate with ServiceNow.</a:t>
-            </a:r>
           </a:p>
         </p:txBody>
       </p:sp>
@@ -7663,10 +7378,7 @@
           <a:bodyPr/>
           <a:lstStyle/>
           <a:p>
-            <a:r>
-              <a:rPr lang="en-US" dirty="0"/>
-              <a:t>Challenge Demo – How to Excel in this course</a:t>
-            </a:r>
+            <a:endParaRPr lang="en-US" dirty="0"/>
           </a:p>
         </p:txBody>
       </p:sp>
@@ -7696,10 +7408,7 @@
           <a:bodyPr/>
           <a:lstStyle/>
           <a:p>
-            <a:r>
-              <a:rPr lang="en-US" dirty="0"/>
-              <a:t>Complete a hands-on challenge</a:t>
-            </a:r>
+            <a:endParaRPr lang="en-US" dirty="0"/>
           </a:p>
         </p:txBody>
       </p:sp>
@@ -8001,10 +7710,7 @@
             </a:lvl9pPr>
           </a:lstStyle>
           <a:p>
-            <a:r>
-              <a:rPr lang="en-US" dirty="0"/>
-              <a:t>Your organization needs to relay technical concepts to you. Clients often need to do the same. Take a few moments to get some pen and paper ready to take notes. </a:t>
-            </a:r>
+            <a:endParaRPr lang="en-US" dirty="0"/>
           </a:p>
         </p:txBody>
       </p:sp>
